--- a/images/useR2024 slides.pptx
+++ b/images/useR2024 slides.pptx
@@ -270,7 +270,7 @@
           <a:p>
             <a:fld id="{C39337ED-0F85-483C-8DB1-E8B8F33AB636}" type="datetimeFigureOut">
               <a:rPr lang="en-SG" smtClean="0"/>
-              <a:t>29/6/2024</a:t>
+              <a:t>3/7/2024</a:t>
             </a:fld>
             <a:endParaRPr lang="en-SG"/>
           </a:p>
@@ -470,7 +470,7 @@
           <a:p>
             <a:fld id="{C39337ED-0F85-483C-8DB1-E8B8F33AB636}" type="datetimeFigureOut">
               <a:rPr lang="en-SG" smtClean="0"/>
-              <a:t>29/6/2024</a:t>
+              <a:t>3/7/2024</a:t>
             </a:fld>
             <a:endParaRPr lang="en-SG"/>
           </a:p>
@@ -680,7 +680,7 @@
           <a:p>
             <a:fld id="{C39337ED-0F85-483C-8DB1-E8B8F33AB636}" type="datetimeFigureOut">
               <a:rPr lang="en-SG" smtClean="0"/>
-              <a:t>29/6/2024</a:t>
+              <a:t>3/7/2024</a:t>
             </a:fld>
             <a:endParaRPr lang="en-SG"/>
           </a:p>
@@ -880,7 +880,7 @@
           <a:p>
             <a:fld id="{C39337ED-0F85-483C-8DB1-E8B8F33AB636}" type="datetimeFigureOut">
               <a:rPr lang="en-SG" smtClean="0"/>
-              <a:t>29/6/2024</a:t>
+              <a:t>3/7/2024</a:t>
             </a:fld>
             <a:endParaRPr lang="en-SG"/>
           </a:p>
@@ -1156,7 +1156,7 @@
           <a:p>
             <a:fld id="{C39337ED-0F85-483C-8DB1-E8B8F33AB636}" type="datetimeFigureOut">
               <a:rPr lang="en-SG" smtClean="0"/>
-              <a:t>29/6/2024</a:t>
+              <a:t>3/7/2024</a:t>
             </a:fld>
             <a:endParaRPr lang="en-SG"/>
           </a:p>
@@ -1424,7 +1424,7 @@
           <a:p>
             <a:fld id="{C39337ED-0F85-483C-8DB1-E8B8F33AB636}" type="datetimeFigureOut">
               <a:rPr lang="en-SG" smtClean="0"/>
-              <a:t>29/6/2024</a:t>
+              <a:t>3/7/2024</a:t>
             </a:fld>
             <a:endParaRPr lang="en-SG"/>
           </a:p>
@@ -1839,7 +1839,7 @@
           <a:p>
             <a:fld id="{C39337ED-0F85-483C-8DB1-E8B8F33AB636}" type="datetimeFigureOut">
               <a:rPr lang="en-SG" smtClean="0"/>
-              <a:t>29/6/2024</a:t>
+              <a:t>3/7/2024</a:t>
             </a:fld>
             <a:endParaRPr lang="en-SG"/>
           </a:p>
@@ -1981,7 +1981,7 @@
           <a:p>
             <a:fld id="{C39337ED-0F85-483C-8DB1-E8B8F33AB636}" type="datetimeFigureOut">
               <a:rPr lang="en-SG" smtClean="0"/>
-              <a:t>29/6/2024</a:t>
+              <a:t>3/7/2024</a:t>
             </a:fld>
             <a:endParaRPr lang="en-SG"/>
           </a:p>
@@ -2094,7 +2094,7 @@
           <a:p>
             <a:fld id="{C39337ED-0F85-483C-8DB1-E8B8F33AB636}" type="datetimeFigureOut">
               <a:rPr lang="en-SG" smtClean="0"/>
-              <a:t>29/6/2024</a:t>
+              <a:t>3/7/2024</a:t>
             </a:fld>
             <a:endParaRPr lang="en-SG"/>
           </a:p>
@@ -2407,7 +2407,7 @@
           <a:p>
             <a:fld id="{C39337ED-0F85-483C-8DB1-E8B8F33AB636}" type="datetimeFigureOut">
               <a:rPr lang="en-SG" smtClean="0"/>
-              <a:t>29/6/2024</a:t>
+              <a:t>3/7/2024</a:t>
             </a:fld>
             <a:endParaRPr lang="en-SG"/>
           </a:p>
@@ -2696,7 +2696,7 @@
           <a:p>
             <a:fld id="{C39337ED-0F85-483C-8DB1-E8B8F33AB636}" type="datetimeFigureOut">
               <a:rPr lang="en-SG" smtClean="0"/>
-              <a:t>29/6/2024</a:t>
+              <a:t>3/7/2024</a:t>
             </a:fld>
             <a:endParaRPr lang="en-SG"/>
           </a:p>
@@ -2939,7 +2939,7 @@
           <a:p>
             <a:fld id="{C39337ED-0F85-483C-8DB1-E8B8F33AB636}" type="datetimeFigureOut">
               <a:rPr lang="en-SG" smtClean="0"/>
-              <a:t>29/6/2024</a:t>
+              <a:t>3/7/2024</a:t>
             </a:fld>
             <a:endParaRPr lang="en-SG"/>
           </a:p>
@@ -5788,10 +5788,10 @@
       </p:grpSpPr>
       <p:grpSp>
         <p:nvGrpSpPr>
-          <p:cNvPr id="8" name="Group 7">
-            <a:extLst>
-              <a:ext uri="{FF2B5EF4-FFF2-40B4-BE49-F238E27FC236}">
-                <a16:creationId xmlns:a16="http://schemas.microsoft.com/office/drawing/2014/main" id="{9F347EF5-6B2C-1188-463D-E2771895B41F}"/>
+          <p:cNvPr id="2" name="Group 1">
+            <a:extLst>
+              <a:ext uri="{FF2B5EF4-FFF2-40B4-BE49-F238E27FC236}">
+                <a16:creationId xmlns:a16="http://schemas.microsoft.com/office/drawing/2014/main" id="{AEBE0863-FE75-8A7C-E23D-6F12A4191DB1}"/>
               </a:ext>
             </a:extLst>
           </p:cNvPr>
@@ -5801,177 +5801,198 @@
         <p:grpSpPr>
           <a:xfrm>
             <a:off x="562439" y="1018074"/>
-            <a:ext cx="4892464" cy="4232352"/>
-            <a:chOff x="641097" y="1027906"/>
-            <a:chExt cx="4892464" cy="4232352"/>
+            <a:ext cx="10070154" cy="4232352"/>
+            <a:chOff x="562439" y="1018074"/>
+            <a:chExt cx="10070154" cy="4232352"/>
           </a:xfrm>
         </p:grpSpPr>
-        <p:pic>
-          <p:nvPicPr>
-            <p:cNvPr id="5" name="Picture 4">
+        <p:grpSp>
+          <p:nvGrpSpPr>
+            <p:cNvPr id="8" name="Group 7">
               <a:extLst>
                 <a:ext uri="{FF2B5EF4-FFF2-40B4-BE49-F238E27FC236}">
-                  <a16:creationId xmlns:a16="http://schemas.microsoft.com/office/drawing/2014/main" id="{A2D4A82B-10C7-4D40-5F77-BB8BD329FAB8}"/>
+                  <a16:creationId xmlns:a16="http://schemas.microsoft.com/office/drawing/2014/main" id="{9F347EF5-6B2C-1188-463D-E2771895B41F}"/>
                 </a:ext>
               </a:extLst>
             </p:cNvPr>
-            <p:cNvPicPr>
-              <a:picLocks noChangeAspect="1"/>
-            </p:cNvPicPr>
+            <p:cNvGrpSpPr/>
             <p:nvPr/>
-          </p:nvPicPr>
-          <p:blipFill rotWithShape="1">
-            <a:blip r:embed="rId2"/>
-            <a:srcRect b="11423"/>
-            <a:stretch/>
-          </p:blipFill>
-          <p:spPr>
+          </p:nvGrpSpPr>
+          <p:grpSpPr>
             <a:xfrm>
-              <a:off x="641097" y="1027906"/>
+              <a:off x="562439" y="1018074"/>
               <a:ext cx="4892464" cy="4232352"/>
+              <a:chOff x="641097" y="1027906"/>
+              <a:chExt cx="4892464" cy="4232352"/>
             </a:xfrm>
-            <a:prstGeom prst="rect">
-              <a:avLst/>
-            </a:prstGeom>
-          </p:spPr>
-        </p:pic>
-        <p:cxnSp>
-          <p:nvCxnSpPr>
-            <p:cNvPr id="7" name="Straight Arrow Connector 6">
+          </p:grpSpPr>
+          <p:pic>
+            <p:nvPicPr>
+              <p:cNvPr id="5" name="Picture 4">
+                <a:extLst>
+                  <a:ext uri="{FF2B5EF4-FFF2-40B4-BE49-F238E27FC236}">
+                    <a16:creationId xmlns:a16="http://schemas.microsoft.com/office/drawing/2014/main" id="{A2D4A82B-10C7-4D40-5F77-BB8BD329FAB8}"/>
+                  </a:ext>
+                </a:extLst>
+              </p:cNvPr>
+              <p:cNvPicPr>
+                <a:picLocks noChangeAspect="1"/>
+              </p:cNvPicPr>
+              <p:nvPr/>
+            </p:nvPicPr>
+            <p:blipFill rotWithShape="1">
+              <a:blip r:embed="rId2"/>
+              <a:srcRect b="11423"/>
+              <a:stretch/>
+            </p:blipFill>
+            <p:spPr>
+              <a:xfrm>
+                <a:off x="641097" y="1027906"/>
+                <a:ext cx="4892464" cy="4232352"/>
+              </a:xfrm>
+              <a:prstGeom prst="rect">
+                <a:avLst/>
+              </a:prstGeom>
+            </p:spPr>
+          </p:pic>
+          <p:cxnSp>
+            <p:nvCxnSpPr>
+              <p:cNvPr id="7" name="Straight Arrow Connector 6">
+                <a:extLst>
+                  <a:ext uri="{FF2B5EF4-FFF2-40B4-BE49-F238E27FC236}">
+                    <a16:creationId xmlns:a16="http://schemas.microsoft.com/office/drawing/2014/main" id="{360FBD58-C811-CC0D-5B93-DAFBE241CD4C}"/>
+                  </a:ext>
+                </a:extLst>
+              </p:cNvPr>
+              <p:cNvCxnSpPr/>
+              <p:nvPr/>
+            </p:nvCxnSpPr>
+            <p:spPr>
+              <a:xfrm flipV="1">
+                <a:off x="2222090" y="2064774"/>
+                <a:ext cx="2281084" cy="2635045"/>
+              </a:xfrm>
+              <a:prstGeom prst="straightConnector1">
+                <a:avLst/>
+              </a:prstGeom>
+              <a:ln w="38100">
+                <a:solidFill>
+                  <a:srgbClr val="FF0000"/>
+                </a:solidFill>
+                <a:tailEnd type="triangle"/>
+              </a:ln>
+            </p:spPr>
+            <p:style>
+              <a:lnRef idx="1">
+                <a:schemeClr val="accent1"/>
+              </a:lnRef>
+              <a:fillRef idx="0">
+                <a:schemeClr val="accent1"/>
+              </a:fillRef>
+              <a:effectRef idx="0">
+                <a:schemeClr val="accent1"/>
+              </a:effectRef>
+              <a:fontRef idx="minor">
+                <a:schemeClr val="tx1"/>
+              </a:fontRef>
+            </p:style>
+          </p:cxnSp>
+        </p:grpSp>
+        <p:grpSp>
+          <p:nvGrpSpPr>
+            <p:cNvPr id="13" name="Group 12">
               <a:extLst>
                 <a:ext uri="{FF2B5EF4-FFF2-40B4-BE49-F238E27FC236}">
-                  <a16:creationId xmlns:a16="http://schemas.microsoft.com/office/drawing/2014/main" id="{360FBD58-C811-CC0D-5B93-DAFBE241CD4C}"/>
+                  <a16:creationId xmlns:a16="http://schemas.microsoft.com/office/drawing/2014/main" id="{D5FE75E1-9739-2AD1-42F0-AB6A6982DBC3}"/>
                 </a:ext>
               </a:extLst>
             </p:cNvPr>
-            <p:cNvCxnSpPr/>
+            <p:cNvGrpSpPr/>
             <p:nvPr/>
-          </p:nvCxnSpPr>
-          <p:spPr>
-            <a:xfrm flipV="1">
-              <a:off x="2222090" y="2064774"/>
-              <a:ext cx="2281084" cy="2635045"/>
+          </p:nvGrpSpPr>
+          <p:grpSpPr>
+            <a:xfrm>
+              <a:off x="5747750" y="1018074"/>
+              <a:ext cx="4884843" cy="4206605"/>
+              <a:chOff x="6268958" y="1043821"/>
+              <a:chExt cx="4884843" cy="4206605"/>
             </a:xfrm>
-            <a:prstGeom prst="straightConnector1">
-              <a:avLst/>
-            </a:prstGeom>
-            <a:ln w="38100">
-              <a:solidFill>
-                <a:srgbClr val="FF0000"/>
-              </a:solidFill>
-              <a:tailEnd type="triangle"/>
-            </a:ln>
-          </p:spPr>
-          <p:style>
-            <a:lnRef idx="1">
-              <a:schemeClr val="accent1"/>
-            </a:lnRef>
-            <a:fillRef idx="0">
-              <a:schemeClr val="accent1"/>
-            </a:fillRef>
-            <a:effectRef idx="0">
-              <a:schemeClr val="accent1"/>
-            </a:effectRef>
-            <a:fontRef idx="minor">
-              <a:schemeClr val="tx1"/>
-            </a:fontRef>
-          </p:style>
-        </p:cxnSp>
-      </p:grpSp>
-      <p:grpSp>
-        <p:nvGrpSpPr>
-          <p:cNvPr id="13" name="Group 12">
-            <a:extLst>
-              <a:ext uri="{FF2B5EF4-FFF2-40B4-BE49-F238E27FC236}">
-                <a16:creationId xmlns:a16="http://schemas.microsoft.com/office/drawing/2014/main" id="{D5FE75E1-9739-2AD1-42F0-AB6A6982DBC3}"/>
-              </a:ext>
-            </a:extLst>
-          </p:cNvPr>
-          <p:cNvGrpSpPr/>
-          <p:nvPr/>
-        </p:nvGrpSpPr>
-        <p:grpSpPr>
-          <a:xfrm>
-            <a:off x="6268958" y="1043821"/>
-            <a:ext cx="4884843" cy="4206605"/>
-            <a:chOff x="6268958" y="1043821"/>
-            <a:chExt cx="4884843" cy="4206605"/>
-          </a:xfrm>
-        </p:grpSpPr>
-        <p:pic>
-          <p:nvPicPr>
-            <p:cNvPr id="10" name="Picture 9">
-              <a:extLst>
-                <a:ext uri="{FF2B5EF4-FFF2-40B4-BE49-F238E27FC236}">
-                  <a16:creationId xmlns:a16="http://schemas.microsoft.com/office/drawing/2014/main" id="{C67185B0-8495-DA73-0256-59D2270021F8}"/>
-                </a:ext>
-              </a:extLst>
-            </p:cNvPr>
-            <p:cNvPicPr>
-              <a:picLocks noChangeAspect="1"/>
-            </p:cNvPicPr>
-            <p:nvPr/>
-          </p:nvPicPr>
-          <p:blipFill>
-            <a:blip r:embed="rId3"/>
-            <a:stretch>
-              <a:fillRect/>
-            </a:stretch>
-          </p:blipFill>
-          <p:spPr>
-            <a:xfrm>
-              <a:off x="6268958" y="1043821"/>
-              <a:ext cx="4884843" cy="4206605"/>
-            </a:xfrm>
-            <a:prstGeom prst="rect">
-              <a:avLst/>
-            </a:prstGeom>
-          </p:spPr>
-        </p:pic>
-        <p:cxnSp>
-          <p:nvCxnSpPr>
-            <p:cNvPr id="11" name="Straight Arrow Connector 10">
-              <a:extLst>
-                <a:ext uri="{FF2B5EF4-FFF2-40B4-BE49-F238E27FC236}">
-                  <a16:creationId xmlns:a16="http://schemas.microsoft.com/office/drawing/2014/main" id="{BA479BDC-DDAB-8D93-2F58-E67E33B62C0A}"/>
-                </a:ext>
-              </a:extLst>
-            </p:cNvPr>
-            <p:cNvCxnSpPr>
-              <a:cxnSpLocks/>
-            </p:cNvCxnSpPr>
-            <p:nvPr/>
-          </p:nvCxnSpPr>
-          <p:spPr>
-            <a:xfrm flipV="1">
-              <a:off x="7880554" y="1986116"/>
-              <a:ext cx="2266336" cy="2885768"/>
-            </a:xfrm>
-            <a:prstGeom prst="straightConnector1">
-              <a:avLst/>
-            </a:prstGeom>
-            <a:ln w="38100">
-              <a:solidFill>
-                <a:srgbClr val="FF0000"/>
-              </a:solidFill>
-              <a:tailEnd type="triangle"/>
-            </a:ln>
-          </p:spPr>
-          <p:style>
-            <a:lnRef idx="1">
-              <a:schemeClr val="accent1"/>
-            </a:lnRef>
-            <a:fillRef idx="0">
-              <a:schemeClr val="accent1"/>
-            </a:fillRef>
-            <a:effectRef idx="0">
-              <a:schemeClr val="accent1"/>
-            </a:effectRef>
-            <a:fontRef idx="minor">
-              <a:schemeClr val="tx1"/>
-            </a:fontRef>
-          </p:style>
-        </p:cxnSp>
+          </p:grpSpPr>
+          <p:pic>
+            <p:nvPicPr>
+              <p:cNvPr id="10" name="Picture 9">
+                <a:extLst>
+                  <a:ext uri="{FF2B5EF4-FFF2-40B4-BE49-F238E27FC236}">
+                    <a16:creationId xmlns:a16="http://schemas.microsoft.com/office/drawing/2014/main" id="{C67185B0-8495-DA73-0256-59D2270021F8}"/>
+                  </a:ext>
+                </a:extLst>
+              </p:cNvPr>
+              <p:cNvPicPr>
+                <a:picLocks noChangeAspect="1"/>
+              </p:cNvPicPr>
+              <p:nvPr/>
+            </p:nvPicPr>
+            <p:blipFill>
+              <a:blip r:embed="rId3"/>
+              <a:stretch>
+                <a:fillRect/>
+              </a:stretch>
+            </p:blipFill>
+            <p:spPr>
+              <a:xfrm>
+                <a:off x="6268958" y="1043821"/>
+                <a:ext cx="4884843" cy="4206605"/>
+              </a:xfrm>
+              <a:prstGeom prst="rect">
+                <a:avLst/>
+              </a:prstGeom>
+            </p:spPr>
+          </p:pic>
+          <p:cxnSp>
+            <p:nvCxnSpPr>
+              <p:cNvPr id="11" name="Straight Arrow Connector 10">
+                <a:extLst>
+                  <a:ext uri="{FF2B5EF4-FFF2-40B4-BE49-F238E27FC236}">
+                    <a16:creationId xmlns:a16="http://schemas.microsoft.com/office/drawing/2014/main" id="{BA479BDC-DDAB-8D93-2F58-E67E33B62C0A}"/>
+                  </a:ext>
+                </a:extLst>
+              </p:cNvPr>
+              <p:cNvCxnSpPr>
+                <a:cxnSpLocks/>
+              </p:cNvCxnSpPr>
+              <p:nvPr/>
+            </p:nvCxnSpPr>
+            <p:spPr>
+              <a:xfrm flipV="1">
+                <a:off x="7880554" y="1986116"/>
+                <a:ext cx="2266336" cy="2885768"/>
+              </a:xfrm>
+              <a:prstGeom prst="straightConnector1">
+                <a:avLst/>
+              </a:prstGeom>
+              <a:ln w="38100">
+                <a:solidFill>
+                  <a:srgbClr val="FF0000"/>
+                </a:solidFill>
+                <a:tailEnd type="triangle"/>
+              </a:ln>
+            </p:spPr>
+            <p:style>
+              <a:lnRef idx="1">
+                <a:schemeClr val="accent1"/>
+              </a:lnRef>
+              <a:fillRef idx="0">
+                <a:schemeClr val="accent1"/>
+              </a:fillRef>
+              <a:effectRef idx="0">
+                <a:schemeClr val="accent1"/>
+              </a:effectRef>
+              <a:fontRef idx="minor">
+                <a:schemeClr val="tx1"/>
+              </a:fontRef>
+            </p:style>
+          </p:cxnSp>
+        </p:grpSp>
       </p:grpSp>
     </p:spTree>
     <p:extLst>
